--- a/CSCI250-Fall2026/content/Week10_GenAI-Frameworks-Vector/slides.pptx
+++ b/CSCI250-Fall2026/content/Week10_GenAI-Frameworks-Vector/slides.pptx
@@ -4628,7 +4628,7 @@
                 </a:solidFill>
                 <a:latin typeface="Calibri"/>
               </a:rPr>
-              <a:t>– Full proposal + rubric arrive with A7 (Week 14)</a:t>
+              <a:t>– Proposal is Capstone M1 (Week 9); Capstone grows M2–M5</a:t>
             </a:r>
           </a:p>
         </p:txBody>
@@ -4906,7 +4906,7 @@
                 </a:solidFill>
                 <a:latin typeface="Calibri"/>
               </a:rPr>
-              <a:t>✓ No assignment to submit — get ahead on the project</a:t>
+              <a:t>✓ Submit Assignment A8 by Sunday 11:59 PM PST</a:t>
             </a:r>
           </a:p>
         </p:txBody>
@@ -5244,7 +5244,7 @@
                 </a:solidFill>
                 <a:latin typeface="Calibri"/>
               </a:rPr>
-              <a:t>– No graded assignment — Final Project ideas posted</a:t>
+              <a:t>– Assignment A8: embeddings + semantic search + a simple LLM app</a:t>
             </a:r>
           </a:p>
         </p:txBody>
